--- a/termpaper/ppt/ppt/DiPietrantonio_ME5311_TermPresentation.pptx
+++ b/termpaper/ppt/ppt/DiPietrantonio_ME5311_TermPresentation.pptx
@@ -120,6 +120,11 @@
       </a:defRPr>
     </a:lvl9pPr>
   </p:defaultTextStyle>
+  <p:extLst>
+    <p:ext uri="{EFAFB233-063F-42B5-8137-9DF3F51BA10A}">
+      <p15:sldGuideLst xmlns:p15="http://schemas.microsoft.com/office/powerpoint/2012/main"/>
+    </p:ext>
+  </p:extLst>
 </p:presentation>
 </file>
 
@@ -525,7 +530,7 @@
           <a:p>
             <a:r>
               <a:rPr lang="en-US" dirty="0"/>
-              <a:t>Good morning everyone. My name is Christian DiPietrantonio and today I'll be discussing the transported probability density function method used in computational fluid dynamics and its relation to the Black-Scholes-Merton equation Black-Scholes-Merton equation for pricing financial derivatives.
+              <a:t>Good morning, everyone. My name is Christian DiPietrantonio and today I'll be discussing the transported probability density function method used in computational fluid dynamics and its relation to the Black-Scholes-Merton equation Black-Scholes-Merton equation for pricing financial derivatives.
 The central argument is that these two equations, from completely different fields, are derived from the same type of stochastic differential equation and can be solved by the same numerical methods.</a:t>
             </a:r>
           </a:p>
@@ -726,15 +731,7 @@
           <a:p>
             <a:r>
               <a:rPr lang="en-US" dirty="0"/>
-              <a:t>Hull uses </a:t>
-            </a:r>
-            <a:r>
-              <a:rPr lang="en-US" dirty="0" err="1"/>
-              <a:t>Itos</a:t>
-            </a:r>
-            <a:r>
-              <a:rPr lang="en-US" dirty="0"/>
-              <a:t> Lemma to show that, for our GBM model, the price of a stock at a given time follows a lognormal distribution. Therefore, we can use the standard equation for the probability density function of a lognormal variable. For the Langevin SDE, because the coefficients vary with respect to particle velocity/position and time, we don’t have this luxury, so we must construct the PDFs for given time steps using the data from the Monte Carlo simulation. Regardless, both methods are used above, and we can observe excellent agreement between the two.</a:t>
+              <a:t>Hull uses Ito's Lemma to show that, for our GBM model, the price of a stock at a given time follows a lognormal distribution. Therefore, we can use the standard equation for the probability density function of a lognormal variable. For the Langevin SDE, because the coefficients vary with respect to particle velocity/position and time, we don’t have this luxury, so we must construct the PDFs for given time steps using the data from the Monte Carlo simulation. Regardless, both methods are used above, and we can observe excellent agreement between the two.</a:t>
             </a:r>
           </a:p>
         </p:txBody>
@@ -1469,28 +1466,20 @@
                 <a:ea typeface="+mn-ea"/>
                 <a:cs typeface="+mn-cs"/>
               </a:rPr>
-              <a:t>A derivative as defined by Hull is listed above. Very often the variables underlying derivatives are the prices of traded assets. A stock option, for example, is a derivative whose value is dependent on the price of a stock. However, derivatives can be dependent on almost any variable, from the price of hogs to the amount of snow falling at a certain ski resort. There is now active trading in credit derivatives, electricity derivatives, weather derivatives, and insurance derivatives. (HULL)</a:t>
-            </a:r>
-            <a:br>
-              <a:rPr lang="en-US" sz="1200" b="0" i="0" u="none" strike="noStrike" kern="1200" baseline="0" dirty="0">
-                <a:solidFill>
-                  <a:schemeClr val="tx1"/>
-                </a:solidFill>
-                <a:latin typeface="+mn-lt"/>
-                <a:ea typeface="+mn-ea"/>
-                <a:cs typeface="+mn-cs"/>
-              </a:rPr>
-            </a:br>
-            <a:br>
-              <a:rPr lang="en-US" sz="1200" b="0" i="0" u="none" strike="noStrike" kern="1200" baseline="0" dirty="0">
-                <a:solidFill>
-                  <a:schemeClr val="tx1"/>
-                </a:solidFill>
-                <a:latin typeface="+mn-lt"/>
-                <a:ea typeface="+mn-ea"/>
-                <a:cs typeface="+mn-cs"/>
-              </a:rPr>
-            </a:br>
+              <a:t>In order to understand the content of this presentation we must define a few financial terms/concepts. A derivative as defined by Hull is listed above. Very often the variables underlying derivatives are the prices of traded assets. A stock option, for example, is a derivative whose value is dependent on the price of a stock. However, derivatives can be dependent on almost any variable, from the price of hogs to the amount of snow falling at a certain ski resort. There is now active trading in credit derivatives, electricity derivatives, weather derivatives, and insurance derivatives. (HULL)</a:t>
+            </a:r>
+          </a:p>
+          <a:p>
+            <a:endParaRPr lang="en-US" sz="1200" b="0" i="0" u="none" strike="noStrike" kern="1200" baseline="0" dirty="0">
+              <a:solidFill>
+                <a:schemeClr val="tx1"/>
+              </a:solidFill>
+              <a:latin typeface="+mn-lt"/>
+              <a:ea typeface="+mn-ea"/>
+              <a:cs typeface="+mn-cs"/>
+            </a:endParaRPr>
+          </a:p>
+          <a:p>
             <a:r>
               <a:rPr lang="en-US" sz="1200" b="0" i="0" u="none" strike="noStrike" kern="1200" baseline="0" dirty="0">
                 <a:solidFill>
@@ -2521,7 +2510,7 @@
           <a:p>
             <a:r>
               <a:rPr lang="en-US" dirty="0"/>
-              <a:t>Its important to take a moment to talk about both solution methods available. </a:t>
+              <a:t>It's important to take a moment to talk about both solution methods available. </a:t>
             </a:r>
           </a:p>
           <a:p>
@@ -2739,15 +2728,7 @@
             </a:br>
             <a:r>
               <a:rPr lang="en-US" dirty="0"/>
-              <a:t>The Eulerian approach solves the PDE directly on a fixed grid using implicit finite difference scheme, and second order central difference stencils for the first and second derivative terms. Doing so resulted in a tridiagonal system that was extremely similar to what we saw in Project 01 and Flip Classroom </a:t>
-            </a:r>
-            <a:r>
-              <a:rPr lang="en-US" dirty="0" err="1"/>
-              <a:t>Xxercise</a:t>
-            </a:r>
-            <a:r>
-              <a:rPr lang="en-US" dirty="0"/>
-              <a:t> 01. This idea was inspired by Professor Zhao provided me with a repository for </a:t>
+              <a:t>The Eulerian approach solves the PDE directly on a fixed grid using implicit finite difference scheme, and second order central difference stencils for the first and second derivative terms. Doing so resulted in a tridiagonal system that was extremely similar to what we saw in Project 01 and Flip Classroom Exercise 01. This idea was inspired by Professor Zhao provided me with a repository for </a:t>
             </a:r>
             <a:r>
               <a:rPr lang="en-US" dirty="0" err="1"/>
@@ -3911,7 +3892,7 @@
                 <a:ea typeface="Georgia" pitchFamily="34" charset="-122"/>
                 <a:cs typeface="Georgia" pitchFamily="34" charset="-120"/>
               </a:rPr>
-              <a:t>Comments: Monte Carlo Convergence</a:t>
+              <a:t>Monte Carlo Convergence</a:t>
             </a:r>
             <a:endParaRPr lang="en-US" sz="4000" dirty="0"/>
           </a:p>
@@ -5505,8 +5486,8 @@
           </a:prstGeom>
         </p:spPr>
       </p:pic>
-      <mc:AlternateContent xmlns:mc="http://schemas.openxmlformats.org/markup-compatibility/2006">
-        <mc:Choice xmlns:a14="http://schemas.microsoft.com/office/drawing/2010/main" Requires="a14">
+      <mc:AlternateContent xmlns:mc="http://schemas.openxmlformats.org/markup-compatibility/2006" xmlns:a14="http://schemas.microsoft.com/office/drawing/2010/main">
+        <mc:Choice Requires="a14">
           <p:sp>
             <p:nvSpPr>
               <p:cNvPr id="18" name="Rectangle 17">
@@ -5694,7 +5675,7 @@
             </p:txBody>
           </p:sp>
         </mc:Choice>
-        <mc:Fallback>
+        <mc:Fallback xmlns="">
           <p:sp>
             <p:nvSpPr>
               <p:cNvPr id="18" name="Rectangle 17">
@@ -5959,8 +5940,8 @@
           </a:p>
         </p:txBody>
       </p:sp>
-      <mc:AlternateContent xmlns:mc="http://schemas.openxmlformats.org/markup-compatibility/2006">
-        <mc:Choice xmlns:a14="http://schemas.microsoft.com/office/drawing/2010/main" Requires="a14">
+      <mc:AlternateContent xmlns:mc="http://schemas.openxmlformats.org/markup-compatibility/2006" xmlns:a14="http://schemas.microsoft.com/office/drawing/2010/main">
+        <mc:Choice Requires="a14">
           <p:sp>
             <p:nvSpPr>
               <p:cNvPr id="11" name="TextBox 10">
@@ -5989,6 +5970,7 @@
               </a:bodyPr>
               <a:lstStyle/>
               <a:p>
+                <a:pPr/>
                 <a14:m>
                   <m:oMathPara xmlns:m="http://schemas.openxmlformats.org/officeDocument/2006/math">
                     <m:oMathParaPr>
@@ -6269,7 +6251,7 @@
             </p:txBody>
           </p:sp>
         </mc:Choice>
-        <mc:Fallback>
+        <mc:Fallback xmlns="">
           <p:sp>
             <p:nvSpPr>
               <p:cNvPr id="11" name="TextBox 10">
@@ -6314,8 +6296,8 @@
           </p:sp>
         </mc:Fallback>
       </mc:AlternateContent>
-      <mc:AlternateContent xmlns:mc="http://schemas.openxmlformats.org/markup-compatibility/2006">
-        <mc:Choice xmlns:a14="http://schemas.microsoft.com/office/drawing/2010/main" Requires="a14">
+      <mc:AlternateContent xmlns:mc="http://schemas.openxmlformats.org/markup-compatibility/2006" xmlns:a14="http://schemas.microsoft.com/office/drawing/2010/main">
+        <mc:Choice Requires="a14">
           <p:sp>
             <p:nvSpPr>
               <p:cNvPr id="13" name="TextBox 12">
@@ -6344,6 +6326,7 @@
               </a:bodyPr>
               <a:lstStyle/>
               <a:p>
+                <a:pPr/>
                 <a14:m>
                   <m:oMathPara xmlns:m="http://schemas.openxmlformats.org/officeDocument/2006/math">
                     <m:oMathParaPr>
@@ -6397,7 +6380,7 @@
             </p:txBody>
           </p:sp>
         </mc:Choice>
-        <mc:Fallback>
+        <mc:Fallback xmlns="">
           <p:sp>
             <p:nvSpPr>
               <p:cNvPr id="13" name="TextBox 12">
@@ -6487,8 +6470,8 @@
           </a:p>
         </p:txBody>
       </p:sp>
-      <mc:AlternateContent xmlns:mc="http://schemas.openxmlformats.org/markup-compatibility/2006">
-        <mc:Choice xmlns:a14="http://schemas.microsoft.com/office/drawing/2010/main" Requires="a14">
+      <mc:AlternateContent xmlns:mc="http://schemas.openxmlformats.org/markup-compatibility/2006" xmlns:a14="http://schemas.microsoft.com/office/drawing/2010/main">
+        <mc:Choice Requires="a14">
           <p:sp>
             <p:nvSpPr>
               <p:cNvPr id="16" name="TextBox 15">
@@ -6517,6 +6500,7 @@
               </a:bodyPr>
               <a:lstStyle/>
               <a:p>
+                <a:pPr/>
                 <a14:m>
                   <m:oMathPara xmlns:m="http://schemas.openxmlformats.org/officeDocument/2006/math">
                     <m:oMathParaPr>
@@ -6825,7 +6809,7 @@
                             <a:rPr lang="en-US" sz="2400" b="0" i="1" smtClean="0">
                               <a:latin typeface="Cambria Math" panose="02040503050406030204" pitchFamily="18" charset="0"/>
                             </a:rPr>
-                            <m:t>∂</m:t>
+                            <m:t>𝜕</m:t>
                           </m:r>
                           <m:r>
                             <m:rPr>
@@ -6842,7 +6826,7 @@
                             <a:rPr lang="en-US" sz="2400" b="0" i="1" smtClean="0">
                               <a:latin typeface="Cambria Math" panose="02040503050406030204" pitchFamily="18" charset="0"/>
                             </a:rPr>
-                            <m:t>∂</m:t>
+                            <m:t>𝜕</m:t>
                           </m:r>
                           <m:r>
                             <m:rPr>
@@ -6872,7 +6856,7 @@
             </p:txBody>
           </p:sp>
         </mc:Choice>
-        <mc:Fallback>
+        <mc:Fallback xmlns="">
           <p:sp>
             <p:nvSpPr>
               <p:cNvPr id="16" name="TextBox 15">
@@ -6984,8 +6968,8 @@
           </a:p>
         </p:txBody>
       </p:sp>
-      <mc:AlternateContent xmlns:mc="http://schemas.openxmlformats.org/markup-compatibility/2006">
-        <mc:Choice xmlns:a14="http://schemas.microsoft.com/office/drawing/2010/main" Requires="a14">
+      <mc:AlternateContent xmlns:mc="http://schemas.openxmlformats.org/markup-compatibility/2006" xmlns:a14="http://schemas.microsoft.com/office/drawing/2010/main">
+        <mc:Choice Requires="a14">
           <p:sp>
             <p:nvSpPr>
               <p:cNvPr id="3" name="Text 1">
@@ -7153,7 +7137,7 @@
             </p:txBody>
           </p:sp>
         </mc:Choice>
-        <mc:Fallback>
+        <mc:Fallback xmlns="">
           <p:sp>
             <p:nvSpPr>
               <p:cNvPr id="3" name="Text 1">
@@ -7199,8 +7183,8 @@
           </p:sp>
         </mc:Fallback>
       </mc:AlternateContent>
-      <mc:AlternateContent xmlns:mc="http://schemas.openxmlformats.org/markup-compatibility/2006">
-        <mc:Choice xmlns:a14="http://schemas.microsoft.com/office/drawing/2010/main" Requires="a14">
+      <mc:AlternateContent xmlns:mc="http://schemas.openxmlformats.org/markup-compatibility/2006" xmlns:a14="http://schemas.microsoft.com/office/drawing/2010/main">
+        <mc:Choice Requires="a14">
           <p:sp>
             <p:nvSpPr>
               <p:cNvPr id="7" name="TextBox 6">
@@ -7229,6 +7213,7 @@
               </a:bodyPr>
               <a:lstStyle/>
               <a:p>
+                <a:pPr/>
                 <a14:m>
                   <m:oMathPara xmlns:m="http://schemas.openxmlformats.org/officeDocument/2006/math">
                     <m:oMathParaPr>
@@ -7525,7 +7510,7 @@
             </p:txBody>
           </p:sp>
         </mc:Choice>
-        <mc:Fallback>
+        <mc:Fallback xmlns="">
           <p:sp>
             <p:nvSpPr>
               <p:cNvPr id="7" name="TextBox 6">
@@ -7570,8 +7555,8 @@
           </p:sp>
         </mc:Fallback>
       </mc:AlternateContent>
-      <mc:AlternateContent xmlns:mc="http://schemas.openxmlformats.org/markup-compatibility/2006">
-        <mc:Choice xmlns:a14="http://schemas.microsoft.com/office/drawing/2010/main" Requires="a14">
+      <mc:AlternateContent xmlns:mc="http://schemas.openxmlformats.org/markup-compatibility/2006" xmlns:a14="http://schemas.microsoft.com/office/drawing/2010/main">
+        <mc:Choice Requires="a14">
           <p:sp>
             <p:nvSpPr>
               <p:cNvPr id="8" name="Text 1">
@@ -7638,7 +7623,7 @@
                             <a:ea typeface="Calibri" pitchFamily="34" charset="-122"/>
                             <a:cs typeface="Calibri" pitchFamily="34" charset="-120"/>
                           </a:rPr>
-                          <m:t>*</m:t>
+                          <m:t>∗</m:t>
                         </m:r>
                       </m:sup>
                     </m:sSup>
@@ -7715,7 +7700,7 @@
             </p:txBody>
           </p:sp>
         </mc:Choice>
-        <mc:Fallback>
+        <mc:Fallback xmlns="">
           <p:sp>
             <p:nvSpPr>
               <p:cNvPr id="8" name="Text 1">
@@ -7761,8 +7746,8 @@
           </p:sp>
         </mc:Fallback>
       </mc:AlternateContent>
-      <mc:AlternateContent xmlns:mc="http://schemas.openxmlformats.org/markup-compatibility/2006">
-        <mc:Choice xmlns:a14="http://schemas.microsoft.com/office/drawing/2010/main" Requires="a14">
+      <mc:AlternateContent xmlns:mc="http://schemas.openxmlformats.org/markup-compatibility/2006" xmlns:a14="http://schemas.microsoft.com/office/drawing/2010/main">
+        <mc:Choice Requires="a14">
           <p:sp>
             <p:nvSpPr>
               <p:cNvPr id="9" name="TextBox 8">
@@ -7791,6 +7776,7 @@
               </a:bodyPr>
               <a:lstStyle/>
               <a:p>
+                <a:pPr/>
                 <a14:m>
                   <m:oMathPara xmlns:m="http://schemas.openxmlformats.org/officeDocument/2006/math">
                     <m:oMathParaPr>
@@ -7810,7 +7796,7 @@
                             <a:rPr lang="en-US" sz="2400" b="0" i="1" smtClean="0">
                               <a:latin typeface="Cambria Math" panose="02040503050406030204" pitchFamily="18" charset="0"/>
                             </a:rPr>
-                            <m:t>∂</m:t>
+                            <m:t>𝜕</m:t>
                           </m:r>
                           <m:sSup>
                             <m:sSupPr>
@@ -7836,7 +7822,7 @@
                                 <a:rPr lang="en-US" sz="2400" b="0" i="1" smtClean="0">
                                   <a:latin typeface="Cambria Math" panose="02040503050406030204" pitchFamily="18" charset="0"/>
                                 </a:rPr>
-                                <m:t>*</m:t>
+                                <m:t>∗</m:t>
                               </m:r>
                             </m:sup>
                           </m:sSup>
@@ -7846,7 +7832,7 @@
                             <a:rPr lang="en-US" sz="2400" b="0" i="1" smtClean="0">
                               <a:latin typeface="Cambria Math" panose="02040503050406030204" pitchFamily="18" charset="0"/>
                             </a:rPr>
-                            <m:t>∂</m:t>
+                            <m:t>𝜕</m:t>
                           </m:r>
                           <m:r>
                             <m:rPr>
@@ -7909,7 +7895,7 @@
                             <a:rPr lang="en-US" sz="2400" b="0" i="1" smtClean="0">
                               <a:latin typeface="Cambria Math" panose="02040503050406030204" pitchFamily="18" charset="0"/>
                             </a:rPr>
-                            <m:t>∂</m:t>
+                            <m:t>𝜕</m:t>
                           </m:r>
                           <m:sSup>
                             <m:sSupPr>
@@ -7935,7 +7921,7 @@
                                 <a:rPr lang="en-US" sz="2400" b="0" i="1" smtClean="0">
                                   <a:latin typeface="Cambria Math" panose="02040503050406030204" pitchFamily="18" charset="0"/>
                                 </a:rPr>
-                                <m:t>*</m:t>
+                                <m:t>∗</m:t>
                               </m:r>
                             </m:sup>
                           </m:sSup>
@@ -7945,7 +7931,7 @@
                             <a:rPr lang="en-US" sz="2400" b="0" i="1" smtClean="0">
                               <a:latin typeface="Cambria Math" panose="02040503050406030204" pitchFamily="18" charset="0"/>
                             </a:rPr>
-                            <m:t>∂</m:t>
+                            <m:t>𝜕</m:t>
                           </m:r>
                           <m:sSub>
                             <m:sSubPr>
@@ -8006,7 +7992,7 @@
                             <a:rPr lang="en-US" sz="2400" b="0" i="1" smtClean="0">
                               <a:latin typeface="Cambria Math" panose="02040503050406030204" pitchFamily="18" charset="0"/>
                             </a:rPr>
-                            <m:t>∂</m:t>
+                            <m:t>𝜕</m:t>
                           </m:r>
                         </m:num>
                         <m:den>
@@ -8014,7 +8000,7 @@
                             <a:rPr lang="en-US" sz="2400" b="0" i="1" smtClean="0">
                               <a:latin typeface="Cambria Math" panose="02040503050406030204" pitchFamily="18" charset="0"/>
                             </a:rPr>
-                            <m:t>∂</m:t>
+                            <m:t>𝜕</m:t>
                           </m:r>
                           <m:sSub>
                             <m:sSubPr>
@@ -8084,7 +8070,7 @@
                                 <a:rPr lang="en-US" sz="2400" b="0" i="1" smtClean="0">
                                   <a:latin typeface="Cambria Math" panose="02040503050406030204" pitchFamily="18" charset="0"/>
                                 </a:rPr>
-                                <m:t>*</m:t>
+                                <m:t>∗</m:t>
                               </m:r>
                             </m:sup>
                           </m:sSup>
@@ -8316,7 +8302,7 @@
                                 <a:rPr lang="en-US" sz="2400" b="0" i="1" smtClean="0">
                                   <a:latin typeface="Cambria Math" panose="02040503050406030204" pitchFamily="18" charset="0"/>
                                 </a:rPr>
-                                <m:t>*</m:t>
+                                <m:t>∗</m:t>
                               </m:r>
                             </m:sup>
                           </m:sSup>
@@ -8326,7 +8312,7 @@
                             <a:rPr lang="en-US" sz="2400" b="0" i="1" smtClean="0">
                               <a:latin typeface="Cambria Math" panose="02040503050406030204" pitchFamily="18" charset="0"/>
                             </a:rPr>
-                            <m:t>∂</m:t>
+                            <m:t>𝜕</m:t>
                           </m:r>
                           <m:sSub>
                             <m:sSubPr>
@@ -8406,7 +8392,7 @@
             </p:txBody>
           </p:sp>
         </mc:Choice>
-        <mc:Fallback>
+        <mc:Fallback xmlns="">
           <p:sp>
             <p:nvSpPr>
               <p:cNvPr id="9" name="TextBox 8">
@@ -8516,8 +8502,8 @@
           </a:p>
         </p:txBody>
       </p:sp>
-      <mc:AlternateContent xmlns:mc="http://schemas.openxmlformats.org/markup-compatibility/2006">
-        <mc:Choice xmlns:a14="http://schemas.microsoft.com/office/drawing/2010/main" Requires="a14">
+      <mc:AlternateContent xmlns:mc="http://schemas.openxmlformats.org/markup-compatibility/2006" xmlns:a14="http://schemas.microsoft.com/office/drawing/2010/main">
+        <mc:Choice Requires="a14">
           <p:sp>
             <p:nvSpPr>
               <p:cNvPr id="11" name="TextBox 10">
@@ -8546,6 +8532,7 @@
               </a:bodyPr>
               <a:lstStyle/>
               <a:p>
+                <a:pPr/>
                 <a14:m>
                   <m:oMathPara xmlns:m="http://schemas.openxmlformats.org/officeDocument/2006/math">
                     <m:oMathParaPr>
@@ -8582,7 +8569,7 @@
                             <a:rPr lang="en-US" sz="2400" b="0" i="1" smtClean="0">
                               <a:latin typeface="Cambria Math" panose="02040503050406030204" pitchFamily="18" charset="0"/>
                             </a:rPr>
-                            <m:t>*</m:t>
+                            <m:t>∗</m:t>
                           </m:r>
                         </m:sup>
                       </m:sSup>
@@ -8640,7 +8627,7 @@
                             <a:rPr lang="en-US" sz="2400" b="1" i="1" smtClean="0">
                               <a:latin typeface="Cambria Math" panose="02040503050406030204" pitchFamily="18" charset="0"/>
                             </a:rPr>
-                            <m:t>*</m:t>
+                            <m:t>∗</m:t>
                           </m:r>
                         </m:sup>
                       </m:sSup>
@@ -8686,7 +8673,7 @@
                             <a:rPr lang="en-US" sz="2400" b="0" i="1" smtClean="0">
                               <a:latin typeface="Cambria Math" panose="02040503050406030204" pitchFamily="18" charset="0"/>
                             </a:rPr>
-                            <m:t>*</m:t>
+                            <m:t>∗</m:t>
                           </m:r>
                         </m:sup>
                       </m:sSup>
@@ -8777,7 +8764,7 @@
                             <a:rPr lang="en-US" sz="2400" b="0" i="1" smtClean="0">
                               <a:latin typeface="Cambria Math" panose="02040503050406030204" pitchFamily="18" charset="0"/>
                             </a:rPr>
-                            <m:t>*</m:t>
+                            <m:t>∗</m:t>
                           </m:r>
                         </m:sup>
                       </m:sSup>
@@ -8840,7 +8827,7 @@
             </p:txBody>
           </p:sp>
         </mc:Choice>
-        <mc:Fallback>
+        <mc:Fallback xmlns="">
           <p:sp>
             <p:nvSpPr>
               <p:cNvPr id="11" name="TextBox 10">
@@ -9107,8 +9094,8 @@
           </a:p>
         </p:txBody>
       </p:sp>
-      <mc:AlternateContent xmlns:mc="http://schemas.openxmlformats.org/markup-compatibility/2006">
-        <mc:Choice xmlns:a14="http://schemas.microsoft.com/office/drawing/2010/main" Requires="a14">
+      <mc:AlternateContent xmlns:mc="http://schemas.openxmlformats.org/markup-compatibility/2006" xmlns:a14="http://schemas.microsoft.com/office/drawing/2010/main">
+        <mc:Choice Requires="a14">
           <p:sp>
             <p:nvSpPr>
               <p:cNvPr id="6" name="Shape 2">
@@ -9203,7 +9190,7 @@
             </p:txBody>
           </p:sp>
         </mc:Choice>
-        <mc:Fallback>
+        <mc:Fallback xmlns="">
           <p:sp>
             <p:nvSpPr>
               <p:cNvPr id="6" name="Shape 2">
@@ -9249,8 +9236,8 @@
           </p:sp>
         </mc:Fallback>
       </mc:AlternateContent>
-      <mc:AlternateContent xmlns:mc="http://schemas.openxmlformats.org/markup-compatibility/2006">
-        <mc:Choice xmlns:a14="http://schemas.microsoft.com/office/drawing/2010/main" Requires="a14">
+      <mc:AlternateContent xmlns:mc="http://schemas.openxmlformats.org/markup-compatibility/2006" xmlns:a14="http://schemas.microsoft.com/office/drawing/2010/main">
+        <mc:Choice Requires="a14">
           <p:sp>
             <p:nvSpPr>
               <p:cNvPr id="7" name="Shape 4">
@@ -9586,7 +9573,7 @@
             </p:txBody>
           </p:sp>
         </mc:Choice>
-        <mc:Fallback>
+        <mc:Fallback xmlns="">
           <p:sp>
             <p:nvSpPr>
               <p:cNvPr id="7" name="Shape 4">
@@ -11154,8 +11141,8 @@
           </a:p>
         </p:txBody>
       </p:sp>
-      <mc:AlternateContent xmlns:mc="http://schemas.openxmlformats.org/markup-compatibility/2006">
-        <mc:Choice xmlns:a14="http://schemas.microsoft.com/office/drawing/2010/main" Requires="a14">
+      <mc:AlternateContent xmlns:mc="http://schemas.openxmlformats.org/markup-compatibility/2006" xmlns:a14="http://schemas.microsoft.com/office/drawing/2010/main">
+        <mc:Choice Requires="a14">
           <p:sp>
             <p:nvSpPr>
               <p:cNvPr id="11" name="Text 8">
@@ -11470,7 +11457,7 @@
             </p:txBody>
           </p:sp>
         </mc:Choice>
-        <mc:Fallback>
+        <mc:Fallback xmlns="">
           <p:sp>
             <p:nvSpPr>
               <p:cNvPr id="11" name="Text 8">
@@ -11616,7 +11603,7 @@
         </p:blipFill>
         <p:spPr>
           <a:xfrm>
-            <a:off x="2215403" y="949363"/>
+            <a:off x="2215403" y="1076363"/>
             <a:ext cx="7761194" cy="5174129"/>
           </a:xfrm>
           <a:prstGeom prst="rect">
@@ -11638,7 +11625,7 @@
         </p:nvSpPr>
         <p:spPr>
           <a:xfrm>
-            <a:off x="853440" y="6065520"/>
+            <a:off x="853440" y="6192520"/>
             <a:ext cx="10485120" cy="426720"/>
           </a:xfrm>
           <a:prstGeom prst="rect">

--- a/termpaper/ppt/ppt/DiPietrantonio_ME5311_TermPresentation.pptx
+++ b/termpaper/ppt/ppt/DiPietrantonio_ME5311_TermPresentation.pptx
@@ -530,7 +530,7 @@
           <a:p>
             <a:r>
               <a:rPr lang="en-US" dirty="0"/>
-              <a:t>Good morning, everyone. My name is Christian DiPietrantonio and today I'll be discussing the transported probability density function method used in computational fluid dynamics and its relation to the Black-Scholes-Merton equation Black-Scholes-Merton equation for pricing financial derivatives.
+              <a:t>Good morning, everyone. My name is Christian DiPietrantonio and today I'll be discussing the transported probability density function method used in computational fluid dynamics and its relation to the Black-Scholes-Merton equation for pricing financial derivatives.
 The central argument is that these two equations, from completely different fields, are derived from the same type of stochastic differential equation and can be solved by the same numerical methods.</a:t>
             </a:r>
           </a:p>
@@ -1512,7 +1512,7 @@
                 <a:ea typeface="+mn-ea"/>
                 <a:cs typeface="+mn-cs"/>
               </a:rPr>
-              <a:t>As for payout rules, for a short position on an option, you can see that as the price of the stock exceeds the strike price, you lose money because you are obligated to sell the stock at the strike price. For for the long position, the profit increases as the price of the underlying asset (stock) exceeds the strike price. Thus, for the remained of our analysis we can express the value of the function as shown above.</a:t>
+              <a:t>As for payout rules, for a short position on an option, you can see that as the price of the stock exceeds the strike price, you lose money because you are obligated to sell the stock at the strike price. For the long position, the profit increases as the price of the underlying asset (stock) exceeds the strike price. Thus, for the remained of our analysis we can express the value of the function as shown above.</a:t>
             </a:r>
             <a:endParaRPr lang="en-US" dirty="0"/>
           </a:p>
@@ -1878,7 +1878,7 @@
             </a:br>
             <a:r>
               <a:rPr lang="en-US" dirty="0"/>
-              <a:t>Another note on Merton’s derivation: Merton started with the process for a stock price, which is modeled using the Stochastic Differential Equation above. Ito’s lemma is then used to express the rate of change of the value of the option, a hedged portfolio is created and its derivative with respect to time is taken, the result of Ito’s lemma and the SDE are substituted to eliminate the Weiner process, making the portfolio riskless. Because of the assumptions, the change in value of the portfolio must be expressed in terms of the risk-free interest rate. Finally, the original expressions for the value of the portfolio and its change with respect to time can be substituted to obtain the BSM equation! </a:t>
+              <a:t>Another note on Merton’s derivation: Merton started with the process for a stock price, which is modeled using the Stochastic Differential Equation above. Ito’s lemma is then used to express the rate of change of the value of the option, a hedged portfolio is created and its change in value over a small time interval is expressed, then the result of Ito’s lemma and the SDE are substituted to eliminate the Weiner process, making the portfolio riskless. Because of the assumptions, the change in value of the portfolio must be expressed in terms of the risk-free interest rate. Finally, the original expressions for the value of the portfolio and its change with respect to time can be substituted to obtain the BSM equation! (Hull walks through this entire derivation).</a:t>
             </a:r>
           </a:p>
           <a:p>
@@ -2095,7 +2095,7 @@
                 <a:ea typeface="Calibri" panose="020F0502020204030204" pitchFamily="34" charset="0"/>
                 <a:cs typeface="Calibri" panose="020F0502020204030204" pitchFamily="34" charset="0"/>
               </a:rPr>
-              <a:t>Risk-free rate: The rate of interest that can be earned without assuming any risks (treasuries are common, London Interbank Offered Rate, LIBOR (less common after 2008), Overnight Indexed Swap rate (OIS).</a:t>
+              <a:t>Risk-free rate: The rate of interest that can be earned without assuming any risks (treasuries are common, London Interbank Offered Rate, LIBOR (less common after 2008), Overnight Indexed Swap rate (OIS)).</a:t>
             </a:r>
             <a:endParaRPr lang="en-US" dirty="0"/>
           </a:p>
@@ -4499,7 +4499,41 @@
                 <a:ea typeface="Calibri" pitchFamily="34" charset="-122"/>
                 <a:cs typeface="Calibri" pitchFamily="34" charset="-120"/>
               </a:rPr>
-              <a:t>Monte Carlo particle simulations can reproduce the results consistent with analytical probability density functions.</a:t>
+              <a:t>Monte Carlo particle simulations can reproduce the results obtained </a:t>
+            </a:r>
+            <a:r>
+              <a:rPr kumimoji="0" lang="en-US" sz="1600" b="0" i="0" u="none" strike="noStrike" kern="1200" cap="none" spc="0" normalizeH="0" baseline="0" noProof="0">
+                <a:ln>
+                  <a:noFill/>
+                </a:ln>
+                <a:solidFill>
+                  <a:srgbClr val="CADCFC"/>
+                </a:solidFill>
+                <a:effectLst/>
+                <a:uLnTx/>
+                <a:uFillTx/>
+                <a:latin typeface="Calibri" panose="020F0502020204030204"/>
+                <a:ea typeface="Calibri" pitchFamily="34" charset="-122"/>
+                <a:cs typeface="Calibri" pitchFamily="34" charset="-120"/>
+              </a:rPr>
+              <a:t>from analytical </a:t>
+            </a:r>
+            <a:r>
+              <a:rPr kumimoji="0" lang="en-US" sz="1600" b="0" i="0" u="none" strike="noStrike" kern="1200" cap="none" spc="0" normalizeH="0" baseline="0" noProof="0" dirty="0">
+                <a:ln>
+                  <a:noFill/>
+                </a:ln>
+                <a:solidFill>
+                  <a:srgbClr val="CADCFC"/>
+                </a:solidFill>
+                <a:effectLst/>
+                <a:uLnTx/>
+                <a:uFillTx/>
+                <a:latin typeface="Calibri" panose="020F0502020204030204"/>
+                <a:ea typeface="Calibri" pitchFamily="34" charset="-122"/>
+                <a:cs typeface="Calibri" pitchFamily="34" charset="-120"/>
+              </a:rPr>
+              <a:t>probability density functions.</a:t>
             </a:r>
             <a:endParaRPr kumimoji="0" lang="en-US" sz="1600" b="0" i="0" u="none" strike="noStrike" kern="1200" cap="none" spc="0" normalizeH="0" baseline="0" noProof="0" dirty="0">
               <a:ln>
